--- a/support_tickets.pptx
+++ b/support_tickets.pptx
@@ -123,6 +123,139 @@
 </p1510:revInfo>
 </file>
 
+<file path=ppt/changesInfos/changesInfo1.xml><?xml version="1.0" encoding="utf-8"?>
+<pc:chgInfo xmlns:a="http://schemas.openxmlformats.org/drawingml/2006/main" xmlns:r="http://schemas.openxmlformats.org/officeDocument/2006/relationships" xmlns:ac="http://schemas.microsoft.com/office/drawing/2013/main/command" xmlns:pc="http://schemas.microsoft.com/office/powerpoint/2013/main/command">
+  <pc:docChgLst>
+    <pc:chgData name="Igor Pavlić" userId="7b354f043d3cff0b" providerId="LiveId" clId="{6F8BFD3A-A2E3-4F80-9E4A-7532A973E046}"/>
+    <pc:docChg chg="undo custSel modSld">
+      <pc:chgData name="Igor Pavlić" userId="7b354f043d3cff0b" providerId="LiveId" clId="{6F8BFD3A-A2E3-4F80-9E4A-7532A973E046}" dt="2026-03-22T09:29:42.646" v="9" actId="29295"/>
+      <pc:docMkLst>
+        <pc:docMk/>
+      </pc:docMkLst>
+      <pc:sldChg chg="addSp delSp modSp mod setBg">
+        <pc:chgData name="Igor Pavlić" userId="7b354f043d3cff0b" providerId="LiveId" clId="{6F8BFD3A-A2E3-4F80-9E4A-7532A973E046}" dt="2026-03-22T09:29:42.646" v="9" actId="29295"/>
+        <pc:sldMkLst>
+          <pc:docMk/>
+          <pc:sldMk cId="95992585" sldId="257"/>
+        </pc:sldMkLst>
+        <pc:spChg chg="add del">
+          <ac:chgData name="Igor Pavlić" userId="7b354f043d3cff0b" providerId="LiveId" clId="{6F8BFD3A-A2E3-4F80-9E4A-7532A973E046}" dt="2026-03-22T09:26:59.352" v="1" actId="26606"/>
+          <ac:spMkLst>
+            <pc:docMk/>
+            <pc:sldMk cId="95992585" sldId="257"/>
+            <ac:spMk id="7" creationId="{AB8C311F-7253-4AED-9701-7FC0708C41C7}"/>
+          </ac:spMkLst>
+        </pc:spChg>
+        <pc:spChg chg="add del">
+          <ac:chgData name="Igor Pavlić" userId="7b354f043d3cff0b" providerId="LiveId" clId="{6F8BFD3A-A2E3-4F80-9E4A-7532A973E046}" dt="2026-03-22T09:26:59.352" v="1" actId="26606"/>
+          <ac:spMkLst>
+            <pc:docMk/>
+            <pc:sldMk cId="95992585" sldId="257"/>
+            <ac:spMk id="9" creationId="{E2384209-CB15-4CDF-9D31-C44FD9A3F20D}"/>
+          </ac:spMkLst>
+        </pc:spChg>
+        <pc:spChg chg="add del">
+          <ac:chgData name="Igor Pavlić" userId="7b354f043d3cff0b" providerId="LiveId" clId="{6F8BFD3A-A2E3-4F80-9E4A-7532A973E046}" dt="2026-03-22T09:26:59.352" v="1" actId="26606"/>
+          <ac:spMkLst>
+            <pc:docMk/>
+            <pc:sldMk cId="95992585" sldId="257"/>
+            <ac:spMk id="11" creationId="{2633B3B5-CC90-43F0-8714-D31D1F3F0209}"/>
+          </ac:spMkLst>
+        </pc:spChg>
+        <pc:spChg chg="add del">
+          <ac:chgData name="Igor Pavlić" userId="7b354f043d3cff0b" providerId="LiveId" clId="{6F8BFD3A-A2E3-4F80-9E4A-7532A973E046}" dt="2026-03-22T09:26:59.352" v="1" actId="26606"/>
+          <ac:spMkLst>
+            <pc:docMk/>
+            <pc:sldMk cId="95992585" sldId="257"/>
+            <ac:spMk id="13" creationId="{A8D57A06-A426-446D-B02C-A2DC6B62E45E}"/>
+          </ac:spMkLst>
+        </pc:spChg>
+        <pc:spChg chg="add del">
+          <ac:chgData name="Igor Pavlić" userId="7b354f043d3cff0b" providerId="LiveId" clId="{6F8BFD3A-A2E3-4F80-9E4A-7532A973E046}" dt="2026-03-22T09:27:02.289" v="3" actId="26606"/>
+          <ac:spMkLst>
+            <pc:docMk/>
+            <pc:sldMk cId="95992585" sldId="257"/>
+            <ac:spMk id="15" creationId="{01D0AF59-99C3-4251-AB9A-C966C6AD4400}"/>
+          </ac:spMkLst>
+        </pc:spChg>
+        <pc:spChg chg="add del">
+          <ac:chgData name="Igor Pavlić" userId="7b354f043d3cff0b" providerId="LiveId" clId="{6F8BFD3A-A2E3-4F80-9E4A-7532A973E046}" dt="2026-03-22T09:27:02.289" v="3" actId="26606"/>
+          <ac:spMkLst>
+            <pc:docMk/>
+            <pc:sldMk cId="95992585" sldId="257"/>
+            <ac:spMk id="16" creationId="{1855405F-37A2-4869-9154-F8BE3BECE6C3}"/>
+          </ac:spMkLst>
+        </pc:spChg>
+        <pc:spChg chg="add del">
+          <ac:chgData name="Igor Pavlić" userId="7b354f043d3cff0b" providerId="LiveId" clId="{6F8BFD3A-A2E3-4F80-9E4A-7532A973E046}" dt="2026-03-22T09:27:34.769" v="7" actId="26606"/>
+          <ac:spMkLst>
+            <pc:docMk/>
+            <pc:sldMk cId="95992585" sldId="257"/>
+            <ac:spMk id="17" creationId="{FF9F2414-84E8-453E-B1F3-389FDE8192D9}"/>
+          </ac:spMkLst>
+        </pc:spChg>
+        <pc:spChg chg="add del">
+          <ac:chgData name="Igor Pavlić" userId="7b354f043d3cff0b" providerId="LiveId" clId="{6F8BFD3A-A2E3-4F80-9E4A-7532A973E046}" dt="2026-03-22T09:27:34.769" v="7" actId="26606"/>
+          <ac:spMkLst>
+            <pc:docMk/>
+            <pc:sldMk cId="95992585" sldId="257"/>
+            <ac:spMk id="18" creationId="{F3060C83-F051-4F0E-ABAD-AA0DFC48B218}"/>
+          </ac:spMkLst>
+        </pc:spChg>
+        <pc:spChg chg="add del">
+          <ac:chgData name="Igor Pavlić" userId="7b354f043d3cff0b" providerId="LiveId" clId="{6F8BFD3A-A2E3-4F80-9E4A-7532A973E046}" dt="2026-03-22T09:27:34.769" v="7" actId="26606"/>
+          <ac:spMkLst>
+            <pc:docMk/>
+            <pc:sldMk cId="95992585" sldId="257"/>
+            <ac:spMk id="19" creationId="{3ECA69A1-7536-43AC-85EF-C7106179F5ED}"/>
+          </ac:spMkLst>
+        </pc:spChg>
+        <pc:spChg chg="add del">
+          <ac:chgData name="Igor Pavlić" userId="7b354f043d3cff0b" providerId="LiveId" clId="{6F8BFD3A-A2E3-4F80-9E4A-7532A973E046}" dt="2026-03-22T09:27:34.769" v="7" actId="26606"/>
+          <ac:spMkLst>
+            <pc:docMk/>
+            <pc:sldMk cId="95992585" sldId="257"/>
+            <ac:spMk id="20" creationId="{83C98ABE-055B-441F-B07E-44F97F083C39}"/>
+          </ac:spMkLst>
+        </pc:spChg>
+        <pc:spChg chg="add del">
+          <ac:chgData name="Igor Pavlić" userId="7b354f043d3cff0b" providerId="LiveId" clId="{6F8BFD3A-A2E3-4F80-9E4A-7532A973E046}" dt="2026-03-22T09:27:34.769" v="7" actId="26606"/>
+          <ac:spMkLst>
+            <pc:docMk/>
+            <pc:sldMk cId="95992585" sldId="257"/>
+            <ac:spMk id="21" creationId="{29FDB030-9B49-4CED-8CCD-4D99382388AC}"/>
+          </ac:spMkLst>
+        </pc:spChg>
+        <pc:spChg chg="add del">
+          <ac:chgData name="Igor Pavlić" userId="7b354f043d3cff0b" providerId="LiveId" clId="{6F8BFD3A-A2E3-4F80-9E4A-7532A973E046}" dt="2026-03-22T09:27:34.769" v="7" actId="26606"/>
+          <ac:spMkLst>
+            <pc:docMk/>
+            <pc:sldMk cId="95992585" sldId="257"/>
+            <ac:spMk id="22" creationId="{3783CA14-24A1-485C-8B30-D6A5D87987AD}"/>
+          </ac:spMkLst>
+        </pc:spChg>
+        <pc:spChg chg="add del">
+          <ac:chgData name="Igor Pavlić" userId="7b354f043d3cff0b" providerId="LiveId" clId="{6F8BFD3A-A2E3-4F80-9E4A-7532A973E046}" dt="2026-03-22T09:27:34.769" v="7" actId="26606"/>
+          <ac:spMkLst>
+            <pc:docMk/>
+            <pc:sldMk cId="95992585" sldId="257"/>
+            <ac:spMk id="23" creationId="{9A97C86A-04D6-40F7-AE84-31AB43E6A846}"/>
+          </ac:spMkLst>
+        </pc:spChg>
+        <pc:picChg chg="mod">
+          <ac:chgData name="Igor Pavlić" userId="7b354f043d3cff0b" providerId="LiveId" clId="{6F8BFD3A-A2E3-4F80-9E4A-7532A973E046}" dt="2026-03-22T09:29:42.646" v="9" actId="29295"/>
+          <ac:picMkLst>
+            <pc:docMk/>
+            <pc:sldMk cId="95992585" sldId="257"/>
+            <ac:picMk id="2" creationId="{C734405A-E3A3-4569-AABF-D5F89D2D118B}"/>
+          </ac:picMkLst>
+        </pc:picChg>
+      </pc:sldChg>
+    </pc:docChg>
+  </pc:docChgLst>
+</pc:chgInfo>
+</file>
+
 <file path=ppt/slideLayouts/slideLayout1.xml><?xml version="1.0" encoding="utf-8"?>
 <p:sldLayout xmlns:a="http://schemas.openxmlformats.org/drawingml/2006/main" xmlns:r="http://schemas.openxmlformats.org/officeDocument/2006/relationships" xmlns:p="http://schemas.openxmlformats.org/presentationml/2006/main" type="title" preserve="1">
   <p:cSld name="Title Slide">
@@ -270,7 +403,7 @@
           <a:p>
             <a:fld id="{EED1C14C-A143-42F5-B247-D0E800131009}" type="datetimeFigureOut">
               <a:rPr lang="en-US" smtClean="0"/>
-              <a:t>3/21/2026</a:t>
+              <a:t>3/22/2026</a:t>
             </a:fld>
             <a:endParaRPr lang="en-US"/>
           </a:p>
@@ -468,7 +601,7 @@
           <a:p>
             <a:fld id="{EED1C14C-A143-42F5-B247-D0E800131009}" type="datetimeFigureOut">
               <a:rPr lang="en-US" smtClean="0"/>
-              <a:t>3/21/2026</a:t>
+              <a:t>3/22/2026</a:t>
             </a:fld>
             <a:endParaRPr lang="en-US"/>
           </a:p>
@@ -676,7 +809,7 @@
           <a:p>
             <a:fld id="{EED1C14C-A143-42F5-B247-D0E800131009}" type="datetimeFigureOut">
               <a:rPr lang="en-US" smtClean="0"/>
-              <a:t>3/21/2026</a:t>
+              <a:t>3/22/2026</a:t>
             </a:fld>
             <a:endParaRPr lang="en-US"/>
           </a:p>
@@ -874,7 +1007,7 @@
           <a:p>
             <a:fld id="{EED1C14C-A143-42F5-B247-D0E800131009}" type="datetimeFigureOut">
               <a:rPr lang="en-US" smtClean="0"/>
-              <a:t>3/21/2026</a:t>
+              <a:t>3/22/2026</a:t>
             </a:fld>
             <a:endParaRPr lang="en-US"/>
           </a:p>
@@ -1149,7 +1282,7 @@
           <a:p>
             <a:fld id="{EED1C14C-A143-42F5-B247-D0E800131009}" type="datetimeFigureOut">
               <a:rPr lang="en-US" smtClean="0"/>
-              <a:t>3/21/2026</a:t>
+              <a:t>3/22/2026</a:t>
             </a:fld>
             <a:endParaRPr lang="en-US"/>
           </a:p>
@@ -1414,7 +1547,7 @@
           <a:p>
             <a:fld id="{EED1C14C-A143-42F5-B247-D0E800131009}" type="datetimeFigureOut">
               <a:rPr lang="en-US" smtClean="0"/>
-              <a:t>3/21/2026</a:t>
+              <a:t>3/22/2026</a:t>
             </a:fld>
             <a:endParaRPr lang="en-US"/>
           </a:p>
@@ -1826,7 +1959,7 @@
           <a:p>
             <a:fld id="{EED1C14C-A143-42F5-B247-D0E800131009}" type="datetimeFigureOut">
               <a:rPr lang="en-US" smtClean="0"/>
-              <a:t>3/21/2026</a:t>
+              <a:t>3/22/2026</a:t>
             </a:fld>
             <a:endParaRPr lang="en-US"/>
           </a:p>
@@ -1967,7 +2100,7 @@
           <a:p>
             <a:fld id="{EED1C14C-A143-42F5-B247-D0E800131009}" type="datetimeFigureOut">
               <a:rPr lang="en-US" smtClean="0"/>
-              <a:t>3/21/2026</a:t>
+              <a:t>3/22/2026</a:t>
             </a:fld>
             <a:endParaRPr lang="en-US"/>
           </a:p>
@@ -2080,7 +2213,7 @@
           <a:p>
             <a:fld id="{EED1C14C-A143-42F5-B247-D0E800131009}" type="datetimeFigureOut">
               <a:rPr lang="en-US" smtClean="0"/>
-              <a:t>3/21/2026</a:t>
+              <a:t>3/22/2026</a:t>
             </a:fld>
             <a:endParaRPr lang="en-US"/>
           </a:p>
@@ -2391,7 +2524,7 @@
           <a:p>
             <a:fld id="{EED1C14C-A143-42F5-B247-D0E800131009}" type="datetimeFigureOut">
               <a:rPr lang="en-US" smtClean="0"/>
-              <a:t>3/21/2026</a:t>
+              <a:t>3/22/2026</a:t>
             </a:fld>
             <a:endParaRPr lang="en-US"/>
           </a:p>
@@ -2679,7 +2812,7 @@
           <a:p>
             <a:fld id="{EED1C14C-A143-42F5-B247-D0E800131009}" type="datetimeFigureOut">
               <a:rPr lang="en-US" smtClean="0"/>
-              <a:t>3/21/2026</a:t>
+              <a:t>3/22/2026</a:t>
             </a:fld>
             <a:endParaRPr lang="en-US"/>
           </a:p>
@@ -2920,7 +3053,7 @@
           <a:p>
             <a:fld id="{EED1C14C-A143-42F5-B247-D0E800131009}" type="datetimeFigureOut">
               <a:rPr lang="en-US" smtClean="0"/>
-              <a:t>3/21/2026</a:t>
+              <a:t>3/22/2026</a:t>
             </a:fld>
             <a:endParaRPr lang="en-US"/>
           </a:p>
@@ -3437,6 +3570,7 @@
         </p:nvPicPr>
         <p:blipFill>
           <a:blip r:embed="rId2">
+            <a:alphaModFix/>
             <a:extLst>
               <a:ext uri="{28A0092B-C50C-407E-A947-70E740481C1C}">
                 <a14:useLocalDpi xmlns:a14="http://schemas.microsoft.com/office/drawing/2010/main" val="0"/>
